--- a/slides/3. Retrieval Augmented Generation/1. RAG - fundamentals.pptx
+++ b/slides/3. Retrieval Augmented Generation/1. RAG - fundamentals.pptx
@@ -5,7 +5,7 @@
     <p:sldMasterId id="2147483718" r:id="rId1"/>
   </p:sldMasterIdLst>
   <p:notesMasterIdLst>
-    <p:notesMasterId r:id="rId20"/>
+    <p:notesMasterId r:id="rId19"/>
   </p:notesMasterIdLst>
   <p:sldIdLst>
     <p:sldId id="1869" r:id="rId2"/>
@@ -25,7 +25,6 @@
     <p:sldId id="1851" r:id="rId16"/>
     <p:sldId id="1852" r:id="rId17"/>
     <p:sldId id="1858" r:id="rId18"/>
-    <p:sldId id="1868" r:id="rId19"/>
   </p:sldIdLst>
   <p:sldSz cx="12192000" cy="6858000"/>
   <p:notesSz cx="6858000" cy="9144000"/>
@@ -213,7 +212,7 @@
           </a:lstStyle>
           <a:p>
             <a:fld id="{A0AD287E-D527-974B-B600-3E9121D74DD6}" type="datetimeFigureOut">
-              <a:t>26.09.2025</a:t>
+              <a:t>7.05.2026</a:t>
             </a:fld>
             <a:endParaRPr lang="pl-PL"/>
           </a:p>
@@ -658,7 +657,7 @@
           <a:p>
             <a:fld id="{C764DE79-268F-4C1A-8933-263129D2AF90}" type="datetimeFigureOut">
               <a:rPr lang="en-US" dirty="0"/>
-              <a:t>9/26/25</a:t>
+              <a:t>5/7/26</a:t>
             </a:fld>
             <a:endParaRPr lang="en-US" dirty="0"/>
           </a:p>
@@ -913,7 +912,7 @@
           <a:p>
             <a:fld id="{C764DE79-268F-4C1A-8933-263129D2AF90}" type="datetimeFigureOut">
               <a:rPr lang="en-US" dirty="0"/>
-              <a:t>9/26/25</a:t>
+              <a:t>5/7/26</a:t>
             </a:fld>
             <a:endParaRPr lang="en-US" dirty="0"/>
           </a:p>
@@ -1081,7 +1080,7 @@
           <a:p>
             <a:fld id="{C764DE79-268F-4C1A-8933-263129D2AF90}" type="datetimeFigureOut">
               <a:rPr lang="en-US" dirty="0"/>
-              <a:t>9/26/25</a:t>
+              <a:t>5/7/26</a:t>
             </a:fld>
             <a:endParaRPr lang="en-US" dirty="0"/>
           </a:p>
@@ -1259,7 +1258,7 @@
           <a:p>
             <a:fld id="{C764DE79-268F-4C1A-8933-263129D2AF90}" type="datetimeFigureOut">
               <a:rPr lang="en-US" dirty="0"/>
-              <a:t>9/26/25</a:t>
+              <a:t>5/7/26</a:t>
             </a:fld>
             <a:endParaRPr lang="en-US" dirty="0"/>
           </a:p>
@@ -1457,7 +1456,7 @@
           <a:p>
             <a:fld id="{C764DE79-268F-4C1A-8933-263129D2AF90}" type="datetimeFigureOut">
               <a:rPr lang="en-US" dirty="0"/>
-              <a:t>9/26/25</a:t>
+              <a:t>5/7/26</a:t>
             </a:fld>
             <a:endParaRPr lang="en-US" dirty="0"/>
           </a:p>
@@ -1702,7 +1701,7 @@
           <a:p>
             <a:fld id="{C764DE79-268F-4C1A-8933-263129D2AF90}" type="datetimeFigureOut">
               <a:rPr lang="en-US" dirty="0"/>
-              <a:t>9/26/25</a:t>
+              <a:t>5/7/26</a:t>
             </a:fld>
             <a:endParaRPr lang="en-US" dirty="0"/>
           </a:p>
@@ -1987,7 +1986,7 @@
           <a:p>
             <a:fld id="{C764DE79-268F-4C1A-8933-263129D2AF90}" type="datetimeFigureOut">
               <a:rPr lang="en-US" dirty="0"/>
-              <a:t>9/26/25</a:t>
+              <a:t>5/7/26</a:t>
             </a:fld>
             <a:endParaRPr lang="en-US" dirty="0"/>
           </a:p>
@@ -2406,7 +2405,7 @@
           <a:p>
             <a:fld id="{C764DE79-268F-4C1A-8933-263129D2AF90}" type="datetimeFigureOut">
               <a:rPr lang="en-US" dirty="0"/>
-              <a:t>9/26/25</a:t>
+              <a:t>5/7/26</a:t>
             </a:fld>
             <a:endParaRPr lang="en-US" dirty="0"/>
           </a:p>
@@ -2523,7 +2522,7 @@
           <a:p>
             <a:fld id="{C764DE79-268F-4C1A-8933-263129D2AF90}" type="datetimeFigureOut">
               <a:rPr lang="en-US" dirty="0"/>
-              <a:t>9/26/25</a:t>
+              <a:t>5/7/26</a:t>
             </a:fld>
             <a:endParaRPr lang="en-US" dirty="0"/>
           </a:p>
@@ -2618,7 +2617,7 @@
           <a:p>
             <a:fld id="{C764DE79-268F-4C1A-8933-263129D2AF90}" type="datetimeFigureOut">
               <a:rPr lang="en-US" dirty="0"/>
-              <a:t>9/26/25</a:t>
+              <a:t>5/7/26</a:t>
             </a:fld>
             <a:endParaRPr lang="en-US" dirty="0"/>
           </a:p>
@@ -2893,7 +2892,7 @@
           <a:p>
             <a:fld id="{C764DE79-268F-4C1A-8933-263129D2AF90}" type="datetimeFigureOut">
               <a:rPr lang="en-US" dirty="0"/>
-              <a:t>9/26/25</a:t>
+              <a:t>5/7/26</a:t>
             </a:fld>
             <a:endParaRPr lang="en-US" dirty="0"/>
           </a:p>
@@ -3203,7 +3202,7 @@
           <a:p>
             <a:fld id="{C764DE79-268F-4C1A-8933-263129D2AF90}" type="datetimeFigureOut">
               <a:rPr lang="en-US" dirty="0"/>
-              <a:t>9/26/25</a:t>
+              <a:t>5/7/26</a:t>
             </a:fld>
             <a:endParaRPr lang="en-US" dirty="0"/>
           </a:p>
@@ -4476,10 +4475,10 @@
             <p:nvPr/>
           </p:nvPicPr>
           <p:blipFill>
-            <a:blip r:embed="rId2">
+            <a:blip>
               <a:extLst>
                 <a:ext uri="{96DAC541-7B7A-43D3-8B79-37D633B846F1}">
-                  <asvg:svgBlip xmlns:asvg="http://schemas.microsoft.com/office/drawing/2016/SVG/main" r:embed="rId3"/>
+                  <asvg:svgBlip xmlns:asvg="http://schemas.microsoft.com/office/drawing/2016/SVG/main" r:embed="rId2"/>
                 </a:ext>
               </a:extLst>
             </a:blip>
@@ -4605,10 +4604,10 @@
             <p:nvPr/>
           </p:nvPicPr>
           <p:blipFill>
-            <a:blip r:embed="rId4">
+            <a:blip>
               <a:extLst>
                 <a:ext uri="{96DAC541-7B7A-43D3-8B79-37D633B846F1}">
-                  <asvg:svgBlip xmlns:asvg="http://schemas.microsoft.com/office/drawing/2016/SVG/main" r:embed="rId5"/>
+                  <asvg:svgBlip xmlns:asvg="http://schemas.microsoft.com/office/drawing/2016/SVG/main" r:embed="rId3"/>
                 </a:ext>
               </a:extLst>
             </a:blip>
@@ -4698,7 +4697,7 @@
             <p:nvPr/>
           </p:nvPicPr>
           <p:blipFill>
-            <a:blip r:embed="rId6">
+            <a:blip r:embed="rId4">
               <a:extLst>
                 <a:ext uri="{28A0092B-C50C-407E-A947-70E740481C1C}">
                   <a14:useLocalDpi xmlns:a14="http://schemas.microsoft.com/office/drawing/2010/main" val="0"/>
@@ -5173,10 +5172,10 @@
             <p:nvPr/>
           </p:nvPicPr>
           <p:blipFill>
-            <a:blip r:embed="rId2">
+            <a:blip>
               <a:extLst>
                 <a:ext uri="{96DAC541-7B7A-43D3-8B79-37D633B846F1}">
-                  <asvg:svgBlip xmlns:asvg="http://schemas.microsoft.com/office/drawing/2016/SVG/main" r:embed="rId3"/>
+                  <asvg:svgBlip xmlns:asvg="http://schemas.microsoft.com/office/drawing/2016/SVG/main" r:embed="rId2"/>
                 </a:ext>
               </a:extLst>
             </a:blip>
@@ -5266,7 +5265,7 @@
             <p:nvPr/>
           </p:nvPicPr>
           <p:blipFill>
-            <a:blip r:embed="rId4"/>
+            <a:blip r:embed="rId3"/>
             <a:stretch>
               <a:fillRect/>
             </a:stretch>
@@ -5353,7 +5352,7 @@
             <p:nvPr/>
           </p:nvPicPr>
           <p:blipFill>
-            <a:blip r:embed="rId5"/>
+            <a:blip r:embed="rId4"/>
             <a:stretch>
               <a:fillRect/>
             </a:stretch>
@@ -5535,7 +5534,7 @@
             <p:nvPr/>
           </p:nvPicPr>
           <p:blipFill>
-            <a:blip r:embed="rId4"/>
+            <a:blip r:embed="rId3"/>
             <a:stretch>
               <a:fillRect/>
             </a:stretch>
@@ -5622,7 +5621,7 @@
             <p:nvPr/>
           </p:nvPicPr>
           <p:blipFill>
-            <a:blip r:embed="rId5"/>
+            <a:blip r:embed="rId4"/>
             <a:stretch>
               <a:fillRect/>
             </a:stretch>
@@ -5804,7 +5803,7 @@
             <p:nvPr/>
           </p:nvPicPr>
           <p:blipFill>
-            <a:blip r:embed="rId4"/>
+            <a:blip r:embed="rId3"/>
             <a:stretch>
               <a:fillRect/>
             </a:stretch>
@@ -5891,7 +5890,7 @@
             <p:nvPr/>
           </p:nvPicPr>
           <p:blipFill>
-            <a:blip r:embed="rId5"/>
+            <a:blip r:embed="rId4"/>
             <a:stretch>
               <a:fillRect/>
             </a:stretch>
@@ -6053,7 +6052,7 @@
           <p:nvPr/>
         </p:nvPicPr>
         <p:blipFill>
-          <a:blip r:embed="rId6"/>
+          <a:blip r:embed="rId5"/>
           <a:stretch>
             <a:fillRect/>
           </a:stretch>
@@ -6083,7 +6082,7 @@
           <p:nvPr/>
         </p:nvPicPr>
         <p:blipFill>
-          <a:blip r:embed="rId6"/>
+          <a:blip r:embed="rId5"/>
           <a:stretch>
             <a:fillRect/>
           </a:stretch>
@@ -6113,7 +6112,7 @@
           <p:nvPr/>
         </p:nvPicPr>
         <p:blipFill>
-          <a:blip r:embed="rId6"/>
+          <a:blip r:embed="rId5"/>
           <a:stretch>
             <a:fillRect/>
           </a:stretch>
@@ -6143,7 +6142,7 @@
           <p:nvPr/>
         </p:nvPicPr>
         <p:blipFill>
-          <a:blip r:embed="rId7"/>
+          <a:blip r:embed="rId6"/>
           <a:stretch>
             <a:fillRect/>
           </a:stretch>
@@ -6462,10 +6461,10 @@
             <p:nvPr/>
           </p:nvPicPr>
           <p:blipFill>
-            <a:blip r:embed="rId8">
+            <a:blip>
               <a:extLst>
                 <a:ext uri="{96DAC541-7B7A-43D3-8B79-37D633B846F1}">
-                  <asvg:svgBlip xmlns:asvg="http://schemas.microsoft.com/office/drawing/2016/SVG/main" r:embed="rId9"/>
+                  <asvg:svgBlip xmlns:asvg="http://schemas.microsoft.com/office/drawing/2016/SVG/main" r:embed="rId7"/>
                 </a:ext>
               </a:extLst>
             </a:blip>
@@ -6555,7 +6554,7 @@
             <p:nvPr/>
           </p:nvPicPr>
           <p:blipFill>
-            <a:blip r:embed="rId10">
+            <a:blip r:embed="rId8">
               <a:extLst>
                 <a:ext uri="{28A0092B-C50C-407E-A947-70E740481C1C}">
                   <a14:useLocalDpi xmlns:a14="http://schemas.microsoft.com/office/drawing/2010/main" val="0"/>
@@ -7475,36 +7474,6 @@
 </p:sld>
 </file>
 
-<file path=ppt/slides/slide18.xml><?xml version="1.0" encoding="utf-8"?>
-<p:sld xmlns:a="http://schemas.openxmlformats.org/drawingml/2006/main" xmlns:r="http://schemas.openxmlformats.org/officeDocument/2006/relationships" xmlns:p="http://schemas.openxmlformats.org/presentationml/2006/main">
-  <p:cSld>
-    <p:spTree>
-      <p:nvGrpSpPr>
-        <p:cNvPr id="1" name=""/>
-        <p:cNvGrpSpPr/>
-        <p:nvPr/>
-      </p:nvGrpSpPr>
-      <p:grpSpPr>
-        <a:xfrm>
-          <a:off x="0" y="0"/>
-          <a:ext cx="0" cy="0"/>
-          <a:chOff x="0" y="0"/>
-          <a:chExt cx="0" cy="0"/>
-        </a:xfrm>
-      </p:grpSpPr>
-    </p:spTree>
-    <p:extLst>
-      <p:ext uri="{BB962C8B-B14F-4D97-AF65-F5344CB8AC3E}">
-        <p14:creationId xmlns:p14="http://schemas.microsoft.com/office/powerpoint/2010/main" val="1855392673"/>
-      </p:ext>
-    </p:extLst>
-  </p:cSld>
-  <p:clrMapOvr>
-    <a:masterClrMapping/>
-  </p:clrMapOvr>
-</p:sld>
-</file>
-
 <file path=ppt/slides/slide2.xml><?xml version="1.0" encoding="utf-8"?>
 <p:sld xmlns:a="http://schemas.openxmlformats.org/drawingml/2006/main" xmlns:r="http://schemas.openxmlformats.org/officeDocument/2006/relationships" xmlns:p="http://schemas.openxmlformats.org/presentationml/2006/main">
   <p:cSld>
@@ -7537,10 +7506,10 @@
           <p:nvPr/>
         </p:nvPicPr>
         <p:blipFill>
-          <a:blip r:embed="rId2">
+          <a:blip>
             <a:extLst>
               <a:ext uri="{96DAC541-7B7A-43D3-8B79-37D633B846F1}">
-                <asvg:svgBlip xmlns:asvg="http://schemas.microsoft.com/office/drawing/2016/SVG/main" r:embed="rId3"/>
+                <asvg:svgBlip xmlns:asvg="http://schemas.microsoft.com/office/drawing/2016/SVG/main" r:embed="rId2"/>
               </a:ext>
             </a:extLst>
           </a:blip>
@@ -9953,10 +9922,10 @@
           <p:nvPr/>
         </p:nvPicPr>
         <p:blipFill>
-          <a:blip r:embed="rId4">
+          <a:blip>
             <a:extLst>
               <a:ext uri="{96DAC541-7B7A-43D3-8B79-37D633B846F1}">
-                <asvg:svgBlip xmlns:asvg="http://schemas.microsoft.com/office/drawing/2016/SVG/main" r:embed="rId5"/>
+                <asvg:svgBlip xmlns:asvg="http://schemas.microsoft.com/office/drawing/2016/SVG/main" r:embed="rId3"/>
               </a:ext>
             </a:extLst>
           </a:blip>
@@ -10009,10 +9978,10 @@
             <p:nvPr/>
           </p:nvPicPr>
           <p:blipFill>
-            <a:blip r:embed="rId6">
+            <a:blip>
               <a:extLst>
                 <a:ext uri="{96DAC541-7B7A-43D3-8B79-37D633B846F1}">
-                  <asvg:svgBlip xmlns:asvg="http://schemas.microsoft.com/office/drawing/2016/SVG/main" r:embed="rId7"/>
+                  <asvg:svgBlip xmlns:asvg="http://schemas.microsoft.com/office/drawing/2016/SVG/main" r:embed="rId4"/>
                 </a:ext>
               </a:extLst>
             </a:blip>
@@ -10494,10 +10463,10 @@
           <p:nvPr/>
         </p:nvPicPr>
         <p:blipFill>
-          <a:blip r:embed="rId2">
+          <a:blip>
             <a:extLst>
               <a:ext uri="{96DAC541-7B7A-43D3-8B79-37D633B846F1}">
-                <asvg:svgBlip xmlns:asvg="http://schemas.microsoft.com/office/drawing/2016/SVG/main" r:embed="rId3"/>
+                <asvg:svgBlip xmlns:asvg="http://schemas.microsoft.com/office/drawing/2016/SVG/main" r:embed="rId2"/>
               </a:ext>
             </a:extLst>
           </a:blip>
@@ -10624,10 +10593,10 @@
           <p:nvPr/>
         </p:nvPicPr>
         <p:blipFill>
-          <a:blip r:embed="rId4">
+          <a:blip>
             <a:extLst>
               <a:ext uri="{96DAC541-7B7A-43D3-8B79-37D633B846F1}">
-                <asvg:svgBlip xmlns:asvg="http://schemas.microsoft.com/office/drawing/2016/SVG/main" r:embed="rId5"/>
+                <asvg:svgBlip xmlns:asvg="http://schemas.microsoft.com/office/drawing/2016/SVG/main" r:embed="rId3"/>
               </a:ext>
             </a:extLst>
           </a:blip>
@@ -12852,7 +12821,7 @@
           <p:nvPr/>
         </p:nvPicPr>
         <p:blipFill>
-          <a:blip r:embed="rId6">
+          <a:blip r:embed="rId4">
             <a:extLst>
               <a:ext uri="{28A0092B-C50C-407E-A947-70E740481C1C}">
                 <a14:useLocalDpi xmlns:a14="http://schemas.microsoft.com/office/drawing/2010/main" val="0"/>
@@ -12946,10 +12915,10 @@
           <p:nvPr/>
         </p:nvPicPr>
         <p:blipFill>
-          <a:blip r:embed="rId7">
+          <a:blip>
             <a:extLst>
               <a:ext uri="{96DAC541-7B7A-43D3-8B79-37D633B846F1}">
-                <asvg:svgBlip xmlns:asvg="http://schemas.microsoft.com/office/drawing/2016/SVG/main" r:embed="rId8"/>
+                <asvg:svgBlip xmlns:asvg="http://schemas.microsoft.com/office/drawing/2016/SVG/main" r:embed="rId5"/>
               </a:ext>
             </a:extLst>
           </a:blip>
@@ -13002,10 +12971,10 @@
             <p:nvPr/>
           </p:nvPicPr>
           <p:blipFill>
-            <a:blip r:embed="rId9">
+            <a:blip>
               <a:extLst>
                 <a:ext uri="{96DAC541-7B7A-43D3-8B79-37D633B846F1}">
-                  <asvg:svgBlip xmlns:asvg="http://schemas.microsoft.com/office/drawing/2016/SVG/main" r:embed="rId10"/>
+                  <asvg:svgBlip xmlns:asvg="http://schemas.microsoft.com/office/drawing/2016/SVG/main" r:embed="rId6"/>
                 </a:ext>
               </a:extLst>
             </a:blip>
@@ -13173,10 +13142,10 @@
           <p:nvPr/>
         </p:nvPicPr>
         <p:blipFill>
-          <a:blip r:embed="rId7">
+          <a:blip>
             <a:extLst>
               <a:ext uri="{96DAC541-7B7A-43D3-8B79-37D633B846F1}">
-                <asvg:svgBlip xmlns:asvg="http://schemas.microsoft.com/office/drawing/2016/SVG/main" r:embed="rId8"/>
+                <asvg:svgBlip xmlns:asvg="http://schemas.microsoft.com/office/drawing/2016/SVG/main" r:embed="rId5"/>
               </a:ext>
             </a:extLst>
           </a:blip>
@@ -13327,7 +13296,7 @@
             <p:nvPr/>
           </p:nvPicPr>
           <p:blipFill>
-            <a:blip r:embed="rId11"/>
+            <a:blip r:embed="rId7"/>
             <a:stretch>
               <a:fillRect/>
             </a:stretch>
@@ -13357,7 +13326,7 @@
             <p:nvPr/>
           </p:nvPicPr>
           <p:blipFill>
-            <a:blip r:embed="rId11"/>
+            <a:blip r:embed="rId7"/>
             <a:stretch>
               <a:fillRect/>
             </a:stretch>
@@ -13387,7 +13356,7 @@
             <p:nvPr/>
           </p:nvPicPr>
           <p:blipFill>
-            <a:blip r:embed="rId11"/>
+            <a:blip r:embed="rId7"/>
             <a:stretch>
               <a:fillRect/>
             </a:stretch>
@@ -13545,10 +13514,10 @@
                   <p:nvPr/>
                 </p:nvPicPr>
                 <p:blipFill>
-                  <a:blip r:embed="rId9">
+                  <a:blip>
                     <a:extLst>
                       <a:ext uri="{96DAC541-7B7A-43D3-8B79-37D633B846F1}">
-                        <asvg:svgBlip xmlns:asvg="http://schemas.microsoft.com/office/drawing/2016/SVG/main" r:embed="rId10"/>
+                        <asvg:svgBlip xmlns:asvg="http://schemas.microsoft.com/office/drawing/2016/SVG/main" r:embed="rId6"/>
                       </a:ext>
                     </a:extLst>
                   </a:blip>
@@ -13717,7 +13686,7 @@
               <p:nvPr/>
             </p:nvPicPr>
             <p:blipFill>
-              <a:blip r:embed="rId12"/>
+              <a:blip r:embed="rId8"/>
               <a:stretch>
                 <a:fillRect/>
               </a:stretch>
@@ -14432,10 +14401,10 @@
           <p:nvPr/>
         </p:nvPicPr>
         <p:blipFill>
-          <a:blip r:embed="rId2">
+          <a:blip>
             <a:extLst>
               <a:ext uri="{96DAC541-7B7A-43D3-8B79-37D633B846F1}">
-                <asvg:svgBlip xmlns:asvg="http://schemas.microsoft.com/office/drawing/2016/SVG/main" r:embed="rId3"/>
+                <asvg:svgBlip xmlns:asvg="http://schemas.microsoft.com/office/drawing/2016/SVG/main" r:embed="rId2"/>
               </a:ext>
             </a:extLst>
           </a:blip>
@@ -16754,10 +16723,10 @@
           <p:nvPr/>
         </p:nvPicPr>
         <p:blipFill>
-          <a:blip r:embed="rId4">
+          <a:blip>
             <a:extLst>
               <a:ext uri="{96DAC541-7B7A-43D3-8B79-37D633B846F1}">
-                <asvg:svgBlip xmlns:asvg="http://schemas.microsoft.com/office/drawing/2016/SVG/main" r:embed="rId5"/>
+                <asvg:svgBlip xmlns:asvg="http://schemas.microsoft.com/office/drawing/2016/SVG/main" r:embed="rId3"/>
               </a:ext>
             </a:extLst>
           </a:blip>
@@ -16810,10 +16779,10 @@
             <p:nvPr/>
           </p:nvPicPr>
           <p:blipFill>
-            <a:blip r:embed="rId6">
+            <a:blip>
               <a:extLst>
                 <a:ext uri="{96DAC541-7B7A-43D3-8B79-37D633B846F1}">
-                  <asvg:svgBlip xmlns:asvg="http://schemas.microsoft.com/office/drawing/2016/SVG/main" r:embed="rId7"/>
+                  <asvg:svgBlip xmlns:asvg="http://schemas.microsoft.com/office/drawing/2016/SVG/main" r:embed="rId4"/>
                 </a:ext>
               </a:extLst>
             </a:blip>
@@ -17028,10 +16997,10 @@
           <p:nvPr/>
         </p:nvPicPr>
         <p:blipFill>
-          <a:blip r:embed="rId4">
+          <a:blip>
             <a:extLst>
               <a:ext uri="{96DAC541-7B7A-43D3-8B79-37D633B846F1}">
-                <asvg:svgBlip xmlns:asvg="http://schemas.microsoft.com/office/drawing/2016/SVG/main" r:embed="rId5"/>
+                <asvg:svgBlip xmlns:asvg="http://schemas.microsoft.com/office/drawing/2016/SVG/main" r:embed="rId3"/>
               </a:ext>
             </a:extLst>
           </a:blip>
@@ -17084,7 +17053,7 @@
             <p:nvPr/>
           </p:nvPicPr>
           <p:blipFill>
-            <a:blip r:embed="rId8"/>
+            <a:blip r:embed="rId5"/>
             <a:stretch>
               <a:fillRect/>
             </a:stretch>
@@ -17225,7 +17194,7 @@
               <p:nvPr/>
             </p:nvPicPr>
             <p:blipFill>
-              <a:blip r:embed="rId8"/>
+              <a:blip r:embed="rId5"/>
               <a:stretch>
                 <a:fillRect/>
               </a:stretch>
@@ -17275,7 +17244,7 @@
                 <p:nvPr/>
               </p:nvPicPr>
               <p:blipFill>
-                <a:blip r:embed="rId9"/>
+                <a:blip r:embed="rId6"/>
                 <a:stretch>
                   <a:fillRect/>
                 </a:stretch>
@@ -17305,7 +17274,7 @@
                 <p:nvPr/>
               </p:nvPicPr>
               <p:blipFill>
-                <a:blip r:embed="rId9"/>
+                <a:blip r:embed="rId6"/>
                 <a:stretch>
                   <a:fillRect/>
                 </a:stretch>
@@ -17393,7 +17362,7 @@
             <p:nvPr/>
           </p:nvPicPr>
           <p:blipFill>
-            <a:blip r:embed="rId10"/>
+            <a:blip r:embed="rId7"/>
             <a:stretch>
               <a:fillRect/>
             </a:stretch>
@@ -17423,7 +17392,7 @@
             <p:nvPr/>
           </p:nvPicPr>
           <p:blipFill>
-            <a:blip r:embed="rId11"/>
+            <a:blip r:embed="rId8"/>
             <a:stretch>
               <a:fillRect/>
             </a:stretch>
@@ -17453,7 +17422,7 @@
             <p:nvPr/>
           </p:nvPicPr>
           <p:blipFill>
-            <a:blip r:embed="rId12"/>
+            <a:blip r:embed="rId9"/>
             <a:stretch>
               <a:fillRect/>
             </a:stretch>
@@ -17571,10 +17540,10 @@
               <p:nvPr/>
             </p:nvPicPr>
             <p:blipFill>
-              <a:blip r:embed="rId6">
+              <a:blip>
                 <a:extLst>
                   <a:ext uri="{96DAC541-7B7A-43D3-8B79-37D633B846F1}">
-                    <asvg:svgBlip xmlns:asvg="http://schemas.microsoft.com/office/drawing/2016/SVG/main" r:embed="rId7"/>
+                    <asvg:svgBlip xmlns:asvg="http://schemas.microsoft.com/office/drawing/2016/SVG/main" r:embed="rId4"/>
                   </a:ext>
                 </a:extLst>
               </a:blip>
@@ -17743,7 +17712,7 @@
           <p:nvPr/>
         </p:nvPicPr>
         <p:blipFill>
-          <a:blip r:embed="rId13"/>
+          <a:blip r:embed="rId10"/>
           <a:stretch>
             <a:fillRect/>
           </a:stretch>
@@ -17793,7 +17762,7 @@
             <p:nvPr/>
           </p:nvPicPr>
           <p:blipFill>
-            <a:blip r:embed="rId14">
+            <a:blip r:embed="rId11">
               <a:extLst>
                 <a:ext uri="{28A0092B-C50C-407E-A947-70E740481C1C}">
                   <a14:useLocalDpi xmlns:a14="http://schemas.microsoft.com/office/drawing/2010/main" val="0"/>
@@ -17860,7 +17829,7 @@
               <p:nvPr/>
             </p:nvPicPr>
             <p:blipFill>
-              <a:blip r:embed="rId15"/>
+              <a:blip r:embed="rId12"/>
               <a:stretch>
                 <a:fillRect/>
               </a:stretch>
@@ -17890,7 +17859,7 @@
               <p:nvPr/>
             </p:nvPicPr>
             <p:blipFill>
-              <a:blip r:embed="rId15"/>
+              <a:blip r:embed="rId12"/>
               <a:stretch>
                 <a:fillRect/>
               </a:stretch>
@@ -17920,7 +17889,7 @@
               <p:nvPr/>
             </p:nvPicPr>
             <p:blipFill>
-              <a:blip r:embed="rId15"/>
+              <a:blip r:embed="rId12"/>
               <a:stretch>
                 <a:fillRect/>
               </a:stretch>
@@ -18081,10 +18050,10 @@
           <p:nvPr/>
         </p:nvPicPr>
         <p:blipFill>
-          <a:blip r:embed="rId16">
+          <a:blip>
             <a:extLst>
               <a:ext uri="{96DAC541-7B7A-43D3-8B79-37D633B846F1}">
-                <asvg:svgBlip xmlns:asvg="http://schemas.microsoft.com/office/drawing/2016/SVG/main" r:embed="rId17"/>
+                <asvg:svgBlip xmlns:asvg="http://schemas.microsoft.com/office/drawing/2016/SVG/main" r:embed="rId13"/>
               </a:ext>
             </a:extLst>
           </a:blip>
@@ -18212,7 +18181,7 @@
           <p:nvPr/>
         </p:nvPicPr>
         <p:blipFill>
-          <a:blip r:embed="rId18"/>
+          <a:blip r:embed="rId14"/>
           <a:stretch>
             <a:fillRect/>
           </a:stretch>
@@ -19189,10 +19158,10 @@
           <p:nvPr/>
         </p:nvPicPr>
         <p:blipFill>
-          <a:blip r:embed="rId2">
+          <a:blip>
             <a:extLst>
               <a:ext uri="{96DAC541-7B7A-43D3-8B79-37D633B846F1}">
-                <asvg:svgBlip xmlns:asvg="http://schemas.microsoft.com/office/drawing/2016/SVG/main" r:embed="rId3"/>
+                <asvg:svgBlip xmlns:asvg="http://schemas.microsoft.com/office/drawing/2016/SVG/main" r:embed="rId2"/>
               </a:ext>
             </a:extLst>
           </a:blip>
@@ -19319,10 +19288,10 @@
           <p:nvPr/>
         </p:nvPicPr>
         <p:blipFill>
-          <a:blip r:embed="rId4">
+          <a:blip>
             <a:extLst>
               <a:ext uri="{96DAC541-7B7A-43D3-8B79-37D633B846F1}">
-                <asvg:svgBlip xmlns:asvg="http://schemas.microsoft.com/office/drawing/2016/SVG/main" r:embed="rId5"/>
+                <asvg:svgBlip xmlns:asvg="http://schemas.microsoft.com/office/drawing/2016/SVG/main" r:embed="rId3"/>
               </a:ext>
             </a:extLst>
           </a:blip>
@@ -21594,10 +21563,10 @@
           <p:nvPr/>
         </p:nvPicPr>
         <p:blipFill>
-          <a:blip r:embed="rId6">
+          <a:blip>
             <a:extLst>
               <a:ext uri="{96DAC541-7B7A-43D3-8B79-37D633B846F1}">
-                <asvg:svgBlip xmlns:asvg="http://schemas.microsoft.com/office/drawing/2016/SVG/main" r:embed="rId7"/>
+                <asvg:svgBlip xmlns:asvg="http://schemas.microsoft.com/office/drawing/2016/SVG/main" r:embed="rId4"/>
               </a:ext>
             </a:extLst>
           </a:blip>
@@ -21650,10 +21619,10 @@
             <p:nvPr/>
           </p:nvPicPr>
           <p:blipFill>
-            <a:blip r:embed="rId8">
+            <a:blip>
               <a:extLst>
                 <a:ext uri="{96DAC541-7B7A-43D3-8B79-37D633B846F1}">
-                  <asvg:svgBlip xmlns:asvg="http://schemas.microsoft.com/office/drawing/2016/SVG/main" r:embed="rId9"/>
+                  <asvg:svgBlip xmlns:asvg="http://schemas.microsoft.com/office/drawing/2016/SVG/main" r:embed="rId5"/>
                 </a:ext>
               </a:extLst>
             </a:blip>
@@ -21868,10 +21837,10 @@
           <p:nvPr/>
         </p:nvPicPr>
         <p:blipFill>
-          <a:blip r:embed="rId6">
+          <a:blip>
             <a:extLst>
               <a:ext uri="{96DAC541-7B7A-43D3-8B79-37D633B846F1}">
-                <asvg:svgBlip xmlns:asvg="http://schemas.microsoft.com/office/drawing/2016/SVG/main" r:embed="rId7"/>
+                <asvg:svgBlip xmlns:asvg="http://schemas.microsoft.com/office/drawing/2016/SVG/main" r:embed="rId4"/>
               </a:ext>
             </a:extLst>
           </a:blip>
@@ -22462,10 +22431,10 @@
               <p:nvPr/>
             </p:nvPicPr>
             <p:blipFill>
-              <a:blip r:embed="rId8">
+              <a:blip>
                 <a:extLst>
                   <a:ext uri="{96DAC541-7B7A-43D3-8B79-37D633B846F1}">
-                    <asvg:svgBlip xmlns:asvg="http://schemas.microsoft.com/office/drawing/2016/SVG/main" r:embed="rId9"/>
+                    <asvg:svgBlip xmlns:asvg="http://schemas.microsoft.com/office/drawing/2016/SVG/main" r:embed="rId5"/>
                   </a:ext>
                 </a:extLst>
               </a:blip>
@@ -22634,7 +22603,7 @@
           <p:nvPr/>
         </p:nvPicPr>
         <p:blipFill>
-          <a:blip r:embed="rId10"/>
+          <a:blip r:embed="rId6"/>
           <a:stretch>
             <a:fillRect/>
           </a:stretch>
@@ -22992,10 +22961,10 @@
           <p:nvPr/>
         </p:nvPicPr>
         <p:blipFill>
-          <a:blip r:embed="rId2">
+          <a:blip>
             <a:extLst>
               <a:ext uri="{96DAC541-7B7A-43D3-8B79-37D633B846F1}">
-                <asvg:svgBlip xmlns:asvg="http://schemas.microsoft.com/office/drawing/2016/SVG/main" r:embed="rId3"/>
+                <asvg:svgBlip xmlns:asvg="http://schemas.microsoft.com/office/drawing/2016/SVG/main" r:embed="rId2"/>
               </a:ext>
             </a:extLst>
           </a:blip>
@@ -23028,7 +22997,7 @@
           <p:nvPr/>
         </p:nvPicPr>
         <p:blipFill>
-          <a:blip r:embed="rId4">
+          <a:blip r:embed="rId3">
             <a:extLst>
               <a:ext uri="{28A0092B-C50C-407E-A947-70E740481C1C}">
                 <a14:useLocalDpi xmlns:a14="http://schemas.microsoft.com/office/drawing/2010/main" val="0"/>
@@ -23193,7 +23162,7 @@
             <p:nvPr/>
           </p:nvPicPr>
           <p:blipFill>
-            <a:blip r:embed="rId5"/>
+            <a:blip r:embed="rId4"/>
             <a:stretch>
               <a:fillRect/>
             </a:stretch>
@@ -23223,7 +23192,7 @@
             <p:nvPr/>
           </p:nvPicPr>
           <p:blipFill>
-            <a:blip r:embed="rId5"/>
+            <a:blip r:embed="rId4"/>
             <a:stretch>
               <a:fillRect/>
             </a:stretch>
@@ -23253,7 +23222,7 @@
             <p:nvPr/>
           </p:nvPicPr>
           <p:blipFill>
-            <a:blip r:embed="rId5"/>
+            <a:blip r:embed="rId4"/>
             <a:stretch>
               <a:fillRect/>
             </a:stretch>
@@ -23304,10 +23273,10 @@
             <p:nvPr/>
           </p:nvPicPr>
           <p:blipFill>
-            <a:blip r:embed="rId6">
+            <a:blip>
               <a:extLst>
                 <a:ext uri="{96DAC541-7B7A-43D3-8B79-37D633B846F1}">
-                  <asvg:svgBlip xmlns:asvg="http://schemas.microsoft.com/office/drawing/2016/SVG/main" r:embed="rId7"/>
+                  <asvg:svgBlip xmlns:asvg="http://schemas.microsoft.com/office/drawing/2016/SVG/main" r:embed="rId5"/>
                 </a:ext>
               </a:extLst>
             </a:blip>
@@ -25673,10 +25642,10 @@
             <p:nvPr/>
           </p:nvPicPr>
           <p:blipFill>
-            <a:blip r:embed="rId8">
+            <a:blip>
               <a:extLst>
                 <a:ext uri="{96DAC541-7B7A-43D3-8B79-37D633B846F1}">
-                  <asvg:svgBlip xmlns:asvg="http://schemas.microsoft.com/office/drawing/2016/SVG/main" r:embed="rId9"/>
+                  <asvg:svgBlip xmlns:asvg="http://schemas.microsoft.com/office/drawing/2016/SVG/main" r:embed="rId6"/>
                 </a:ext>
               </a:extLst>
             </a:blip>
@@ -25729,10 +25698,10 @@
               <p:nvPr/>
             </p:nvPicPr>
             <p:blipFill>
-              <a:blip r:embed="rId10">
+              <a:blip>
                 <a:extLst>
                   <a:ext uri="{96DAC541-7B7A-43D3-8B79-37D633B846F1}">
-                    <asvg:svgBlip xmlns:asvg="http://schemas.microsoft.com/office/drawing/2016/SVG/main" r:embed="rId11"/>
+                    <asvg:svgBlip xmlns:asvg="http://schemas.microsoft.com/office/drawing/2016/SVG/main" r:embed="rId7"/>
                   </a:ext>
                 </a:extLst>
               </a:blip>
@@ -25947,10 +25916,10 @@
             <p:nvPr/>
           </p:nvPicPr>
           <p:blipFill>
-            <a:blip r:embed="rId8">
+            <a:blip>
               <a:extLst>
                 <a:ext uri="{96DAC541-7B7A-43D3-8B79-37D633B846F1}">
-                  <asvg:svgBlip xmlns:asvg="http://schemas.microsoft.com/office/drawing/2016/SVG/main" r:embed="rId9"/>
+                  <asvg:svgBlip xmlns:asvg="http://schemas.microsoft.com/office/drawing/2016/SVG/main" r:embed="rId6"/>
                 </a:ext>
               </a:extLst>
             </a:blip>
@@ -26023,10 +25992,10 @@
                 <p:nvPr/>
               </p:nvPicPr>
               <p:blipFill>
-                <a:blip r:embed="rId10">
+                <a:blip>
                   <a:extLst>
                     <a:ext uri="{96DAC541-7B7A-43D3-8B79-37D633B846F1}">
-                      <asvg:svgBlip xmlns:asvg="http://schemas.microsoft.com/office/drawing/2016/SVG/main" r:embed="rId11"/>
+                      <asvg:svgBlip xmlns:asvg="http://schemas.microsoft.com/office/drawing/2016/SVG/main" r:embed="rId7"/>
                     </a:ext>
                   </a:extLst>
                 </a:blip>
@@ -26195,7 +26164,7 @@
             <p:nvPr/>
           </p:nvPicPr>
           <p:blipFill>
-            <a:blip r:embed="rId12"/>
+            <a:blip r:embed="rId8"/>
             <a:stretch>
               <a:fillRect/>
             </a:stretch>
